--- a/curriculum/M01/W07/L01/slides.pptx
+++ b/curriculum/M01/W07/L01/slides.pptx
@@ -14493,7 +14493,36 @@
                 <a:ea typeface="Malgun Gothic"/>
                 <a:cs typeface="Malgun Gothic"/>
               </a:rPr>
-              <a:t> 구조가 되고, 상류 exon의 3′ 말단이 자유로워진다. 2. 자유로워진 exon의 3′ hydroxyl기가 intron 3′ 경계의 인산을 공격한다. 두 exon이 이어지고 lariat 상태의 intron이 떨어져 나와 분해된다.</a:t>
+              <a:t> 구조가 되고, 상류 exon의 3′ 말단이 자유로워진다.</a:t>
+            </a:r>
+          </a:p>
+          <a:p>
+            <a:pPr>
+              <a:spcAft>
+                <a:spcPts val="900"/>
+              </a:spcAft>
+            </a:pPr>
+            <a:r>
+              <a:rPr sz="1600" b="1" i="0">
+                <a:solidFill>
+                  <a:srgbClr val="F2B705"/>
+                </a:solidFill>
+                <a:latin typeface="Malgun Gothic"/>
+                <a:ea typeface="Malgun Gothic"/>
+                <a:cs typeface="Malgun Gothic"/>
+              </a:rPr>
+              <a:t>•  </a:t>
+            </a:r>
+            <a:r>
+              <a:rPr sz="1600" b="0" i="0">
+                <a:solidFill>
+                  <a:srgbClr val="11202B"/>
+                </a:solidFill>
+                <a:latin typeface="Malgun Gothic"/>
+                <a:ea typeface="Malgun Gothic"/>
+                <a:cs typeface="Malgun Gothic"/>
+              </a:rPr>
+              <a:t>2. 자유로워진 exon의 3′ hydroxyl기가 intron 3′ 경계의 인산을 공격한다. 두 exon이 이어지고 lariat 상태의 intron이 떨어져 나와 분해된다.</a:t>
             </a:r>
           </a:p>
           <a:p>

--- a/curriculum/M01/W07/L01/slides.pptx
+++ b/curriculum/M01/W07/L01/slides.pptx
@@ -15976,7 +15976,7 @@
                 <a:ea typeface="Malgun Gothic"/>
                 <a:cs typeface="Malgun Gothic"/>
               </a:rPr>
-              <a:t>M01-W05-L02 핵산의 구조 — 당, 염기, 인산diester 결합</a:t>
+              <a:t>M01-W05-L02 생체분자와 막의 구조 — 당, 염기, 인산diester 결합</a:t>
             </a:r>
           </a:p>
         </p:txBody>
